--- a/presentations/start-04-making-the-case/Start_04_Making_the_Case.pptx
+++ b/presentations/start-04-making-the-case/Start_04_Making_the_Case.pptx
@@ -118,7 +118,7 @@
   <p:extLst>
     <p:ext uri="{521415D9-36F7-43E2-AB2F-B90AF26B5E84}">
       <p14:sectionLst xmlns:p14="http://schemas.microsoft.com/office/powerpoint/2010/main">
-        <p14:section name="Episode 4" id="{142029d9-3865-34b8-65c1-4eddfa65e91c}">
+        <p14:section name="Episode 4" id="{31399ac6-c0b1-839a-2449-df11cd3643e1}">
           <p14:sldIdLst>
             <p14:sldId id="256"/>
             <p14:sldId id="257"/>
@@ -132,7 +132,7 @@
             <p14:sldId id="265"/>
           </p14:sldIdLst>
         </p14:section>
-        <p14:section name="Backup" id="{4350038a-46ff-9939-0b13-77a442906f4d}">
+        <p14:section name="Backup" id="{57424166-0361-c302-b174-d0fe7fd50a01}">
           <p14:sldIdLst>
             <p14:sldId id="266"/>
             <p14:sldId id="267"/>
@@ -7807,13 +7807,7 @@
       </p:sp>
       <p:pic>
         <p:nvPicPr>
-          <p:cNvPr id="5" name="Image 0" descr="">
-            <a:extLst>
-              <a:ext uri="{C183D7F6-B498-43B3-948B-1728B52AA6E4}">
-                <adec:decorative xmlns:adec="http://schemas.microsoft.com/office/drawing/2017/decorative" val="1"/>
-              </a:ext>
-            </a:extLst>
-          </p:cNvPr>
+          <p:cNvPr id="5" name="Image 0" descr="The Federal HR 2.0 window from Book 03: December 10, 2025, the OMB/OPM memo, one Core HCM platform and agencies pause their own; June 10, 2026, the Core HCM award to Oracle Fusion Cloud HCM; onboarding months 1 to 5, the window in which data standards, cleanup, interconnection design and the identity feed are decided; interconnection go-live, where the window closes; FY 2028, one system.">    </p:cNvPr>
           <p:cNvPicPr>
             <a:picLocks noChangeAspect="1"/>
           </p:cNvPicPr>
